--- a/evidence/deck/JSW_Surface_Defect_Detection.pptx
+++ b/evidence/deck/JSW_Surface_Defect_Detection.pptx
@@ -506,6 +506,58 @@
           <a:lstStyle/>
           <a:p>
             <a:r>
+              <a:t>Before anything else, point at the QR code and say the URL out loud: surface-vision.github.io. It</a:t>
+            </a:r>
+          </a:p>
+          <a:p>
+            <a:r>
+              <a:t>opens in a phone or a laptop browser, there is nothing to install and nothing to sign into, and it</a:t>
+            </a:r>
+          </a:p>
+          <a:p>
+            <a:r>
+              <a:t>is not a recording -- it is the shipped 6.22 MB checkpoint, exported to a 12.1 MB ONNX file, running</a:t>
+            </a:r>
+          </a:p>
+          <a:p>
+            <a:r>
+              <a:t>on the judge's own machine through onnxruntime-web. Twelve of the held-out test frames on this</a:t>
+            </a:r>
+          </a:p>
+          <a:p>
+            <a:r>
+              <a:t>slide are built into the page as one-click samples, and any image can be dropped onto it. If a</a:t>
+            </a:r>
+          </a:p>
+          <a:p>
+            <a:r>
+              <a:t>judge opens it while I am talking, everything on slides 3 and 4 can be checked in the room.</a:t>
+            </a:r>
+          </a:p>
+          <a:p/>
+          <a:p>
+            <a:r>
+              <a:t>Two honest details if asked. It runs on the WASM backend, single-threaded, 31.7 ms median a frame</a:t>
+            </a:r>
+          </a:p>
+          <a:p>
+            <a:r>
+              <a:t>in Chrome on the machine we measured (site/verify/parity_browser.json); your machine will differ, and</a:t>
+            </a:r>
+          </a:p>
+          <a:p>
+            <a:r>
+              <a:t>the page times itself rather than repeating our number. And the first load pulls a 12.1 MB model</a:t>
+            </a:r>
+          </a:p>
+          <a:p>
+            <a:r>
+              <a:t>once, so on hotel wifi give it a few seconds -- after that it is instant, and it works offline.</a:t>
+            </a:r>
+          </a:p>
+          <a:p/>
+          <a:p>
+            <a:r>
               <a:t>Open on the mill, not the model.</a:t>
             </a:r>
           </a:p>
@@ -851,6 +903,42 @@
           <a:p/>
           <a:p>
             <a:r>
+              <a:t>One line on the "ships today" strip, because it is easy to skim past: the detector stage of this</a:t>
+            </a:r>
+          </a:p>
+          <a:p>
+            <a:r>
+              <a:t>diagram is running right now at surface-vision.github.io. Same weights, same conf 0.15 and NMS IoU</a:t>
+            </a:r>
+          </a:p>
+          <a:p>
+            <a:r>
+              <a:t>0.45, same 256 px input, same calibration table, same tiling with one global NMS -- boxes 1, 2 and 3</a:t>
+            </a:r>
+          </a:p>
+          <a:p>
+            <a:r>
+              <a:t>of this architecture, with no server behind them. Two things it deliberately does not carry: the OOD</a:t>
+            </a:r>
+          </a:p>
+          <a:p>
+            <a:r>
+              <a:t>gate, which is vendor/ood_guard.py in the Python console and was not ported, so the page will score a</a:t>
+            </a:r>
+          </a:p>
+          <a:p>
+            <a:r>
+              <a:t>photograph of anything; and boxes 4 and 5, the plant side -- no PLC, no MES, no coil record. The page</a:t>
+            </a:r>
+          </a:p>
+          <a:p>
+            <a:r>
+              <a:t>says both of those about itself, in its own limitations panel.</a:t>
+            </a:r>
+          </a:p>
+          <a:p/>
+          <a:p>
+            <a:r>
               <a:t>If asked why 320 px is the tiling reference when we ship at 256: 320 was chosen on validation as a</a:t>
             </a:r>
           </a:p>
@@ -1255,12 +1343,68 @@
           <a:p/>
           <a:p>
             <a:r>
+              <a:t>The last row of the left column is the one a sceptical judge can check without trusting us. The</a:t>
+            </a:r>
+          </a:p>
+          <a:p>
+            <a:r>
+              <a:t>same weights, exported to ONNX and served at surface-vision.github.io, were run against the Python</a:t>
+            </a:r>
+          </a:p>
+          <a:p>
+            <a:r>
+              <a:t>ultralytics reference two ways: the decode module under onnxruntime-node, and the published page</a:t>
+            </a:r>
+          </a:p>
+          <a:p>
+            <a:r>
+              <a:t>itself driven headless in real Chrome. Both agree with PyTorch on 40 of 40 detections across the 12</a:t>
+            </a:r>
+          </a:p>
+          <a:p>
+            <a:r>
+              <a:t>held-out frames, with a maximum box difference of 0.14 px and a maximum confidence difference of</a:t>
+            </a:r>
+          </a:p>
+          <a:p>
+            <a:r>
+              <a:t>0.0016 -- inside a 2 px and 0.01 tolerance, 0 discrepancies, verdict PASS in both</a:t>
+            </a:r>
+          </a:p>
+          <a:p>
+            <a:r>
+              <a:t>site/verify/parity_report.json and site/verify/parity_browser.json. The 0.14 px is not noise in the</a:t>
+            </a:r>
+          </a:p>
+          <a:p>
+            <a:r>
+              <a:t>model, it is the JPEG decoder: hold the source pixels constant and the two paths agree almost</a:t>
+            </a:r>
+          </a:p>
+          <a:p>
+            <a:r>
+              <a:t>exactly; let the browser decode the JPEG itself and a box can move 9.5 px, which is why the harness</a:t>
+            </a:r>
+          </a:p>
+          <a:p>
+            <a:r>
+              <a:t>holds the decoder constant and says so.</a:t>
+            </a:r>
+          </a:p>
+          <a:p/>
+          <a:p>
+            <a:r>
               <a:t>No absolute frame rate anywhere on this slide: GPU throughput on this host moved between 234 and</a:t>
             </a:r>
           </a:p>
           <a:p>
             <a:r>
-              <a:t>283 f/s across sessions for the same model. Bands and ratios only, same discipline as before.</a:t>
+              <a:t>283 f/s across sessions for the same model. Bands and ratios only, same discipline as before. The</a:t>
+            </a:r>
+          </a:p>
+          <a:p>
+            <a:r>
+              <a:t>browser figure obeys the same rule -- 31.7 ms is one machine, one thread, one frame.</a:t>
             </a:r>
           </a:p>
         </p:txBody>
@@ -1583,6 +1727,93 @@
           <a:p/>
           <a:p>
             <a:r>
+              <a:t>Innovation item 7 is the newest one and it is the one to make an argument out of, not a demo of. A</a:t>
+            </a:r>
+          </a:p>
+          <a:p>
+            <a:r>
+              <a:t>mill will not casually ship strip imagery to a cloud -- it is process data, and it is the kind of</a:t>
+            </a:r>
+          </a:p>
+          <a:p>
+            <a:r>
+              <a:t>thing a plant IT policy simply refuses. So the fact that this whole detector is a 12.1 MB file that</a:t>
+            </a:r>
+          </a:p>
+          <a:p>
+            <a:r>
+              <a:t>runs inside a browser tab is not a consolation prize for not having a server, it is the deployment</a:t>
+            </a:r>
+          </a:p>
+          <a:p>
+            <a:r>
+              <a:t>story: no image leaves the plant, no cloud dependency, no per-inference cost, no cold start, and</a:t>
+            </a:r>
+          </a:p>
+          <a:p>
+            <a:r>
+              <a:t>the same ONNX artefact that runs in the tab runs on a mill-floor industrial PC through the same</a:t>
+            </a:r>
+          </a:p>
+          <a:p>
+            <a:r>
+              <a:t>runtime. We checked what the page actually does on the network rather than asserting it: driving</a:t>
+            </a:r>
+          </a:p>
+          <a:p>
+            <a:r>
+              <a:t>the live page in Chrome logged 27 requests, every one a GET for a static file -- the HTML, the CSS,</a:t>
+            </a:r>
+          </a:p>
+          <a:p>
+            <a:r>
+              <a:t>five scripts, two runtime modules from jsDelivr, the model, the sample JPEGs -- zero non-GET and</a:t>
+            </a:r>
+          </a:p>
+          <a:p>
+            <a:r>
+              <a:t>zero requests carrying a body (deck/build/live_demo_check.json). There is no upload path in the</a:t>
+            </a:r>
+          </a:p>
+          <a:p>
+            <a:r>
+              <a:t>page at all.</a:t>
+            </a:r>
+          </a:p>
+          <a:p/>
+          <a:p>
+            <a:r>
+              <a:t>Give the boundary before anyone asks for it. This demonstrates deployability; it is not a claim</a:t>
+            </a:r>
+          </a:p>
+          <a:p>
+            <a:r>
+              <a:t>that production inspection should run in a web browser. The page is single-threaded WASM handling</a:t>
+            </a:r>
+          </a:p>
+          <a:p>
+            <a:r>
+              <a:t>one frame at a time at about 32 ms; slide 2's arithmetic says a real line at full optical</a:t>
+            </a:r>
+          </a:p>
+          <a:p>
+            <a:r>
+              <a:t>resolution needs about 3,064 inferences a second. The browser is the operator console and the</a:t>
+            </a:r>
+          </a:p>
+          <a:p>
+            <a:r>
+              <a:t>proof that the artefact is small enough and portable enough; the line runs the same ONNX on</a:t>
+            </a:r>
+          </a:p>
+          <a:p>
+            <a:r>
+              <a:t>accelerators. What transfers between the two is exactly what parity proves: identical detections.</a:t>
+            </a:r>
+          </a:p>
+          <a:p/>
+          <a:p>
+            <a:r>
               <a:t>Also worth having ready: the transformer point in innovation item 6 is not a swipe. On a dataset</a:t>
             </a:r>
           </a:p>
@@ -1895,7 +2126,48 @@
           <a:p/>
           <a:p>
             <a:r>
+              <a:t>The deployment line in the impact column is the cheapest thing on this slide to verify and the</a:t>
+            </a:r>
+          </a:p>
+          <a:p>
+            <a:r>
+              <a:t>easiest to underrate. Zero infrastructure is not a rhetorical flourish: there is no server to</a:t>
+            </a:r>
+          </a:p>
+          <a:p>
+            <a:r>
+              <a:t>procure, no GPU to rent, no inference bill that scales with coils inspected, and no data-egress</a:t>
+            </a:r>
+          </a:p>
+          <a:p>
+            <a:r>
+              <a:t>conversation with plant IT, because the model goes to the data instead of the data going to the</a:t>
+            </a:r>
+          </a:p>
+          <a:p>
+            <a:r>
+              <a:t>model. The same artefact is what would be installed on a mill-floor PC. It does not replace the</a:t>
+            </a:r>
+          </a:p>
+          <a:p>
+            <a:r>
+              <a:t>serving design on slide 2 -- it is what makes phase 0 cheap to start.</a:t>
+            </a:r>
+          </a:p>
+          <a:p/>
+          <a:p>
+            <a:r>
               <a:t>Close on the ask: give us one line, one camera rig, six weeks, and the downgrade rate from your MIS.</a:t>
+            </a:r>
+          </a:p>
+          <a:p>
+            <a:r>
+              <a:t>And leave the URL on the screen -- surface-vision.github.io -- so the room can keep poking at it</a:t>
+            </a:r>
+          </a:p>
+          <a:p>
+            <a:r>
+              <a:t>after the questions stop.</a:t>
             </a:r>
           </a:p>
         </p:txBody>
@@ -4945,7 +5217,7 @@
         <p:spPr>
           <a:xfrm>
             <a:off x="502920" y="292608"/>
-            <a:ext cx="10454335" cy="256032"/>
+            <a:ext cx="6583680" cy="256032"/>
           </a:xfrm>
           <a:prstGeom prst="rect">
             <a:avLst/>
@@ -4978,8 +5250,8 @@
         </p:nvSpPr>
         <p:spPr>
           <a:xfrm>
-            <a:off x="502920" y="996696"/>
-            <a:ext cx="11185855" cy="201168"/>
+            <a:off x="7269480" y="274320"/>
+            <a:ext cx="3657600" cy="237744"/>
           </a:xfrm>
           <a:prstGeom prst="rect">
             <a:avLst/>
@@ -4992,6 +5264,50 @@
           </a:bodyPr>
           <a:lstStyle/>
           <a:p>
+            <a:pPr algn="r"/>
+            <a:r>
+              <a:rPr sz="800" b="1" i="0">
+                <a:solidFill>
+                  <a:srgbClr val="6B7885"/>
+                </a:solidFill>
+                <a:latin typeface="Arial"/>
+              </a:rPr>
+              <a:t>RUNS LIVE IN YOUR BROWSER   </a:t>
+            </a:r>
+            <a:r>
+              <a:rPr sz="1200" b="1" i="0">
+                <a:solidFill>
+                  <a:srgbClr val="B4551F"/>
+                </a:solidFill>
+                <a:latin typeface="Arial"/>
+              </a:rPr>
+              <a:t>surface-vision.github.io</a:t>
+            </a:r>
+          </a:p>
+        </p:txBody>
+      </p:sp>
+      <p:sp>
+        <p:nvSpPr>
+          <p:cNvPr id="5" name="TextBox 4"/>
+          <p:cNvSpPr txBox="1"/>
+          <p:nvPr/>
+        </p:nvSpPr>
+        <p:spPr>
+          <a:xfrm>
+            <a:off x="502920" y="996696"/>
+            <a:ext cx="11185855" cy="201168"/>
+          </a:xfrm>
+          <a:prstGeom prst="rect">
+            <a:avLst/>
+          </a:prstGeom>
+          <a:noFill/>
+        </p:spPr>
+        <p:txBody>
+          <a:bodyPr wrap="square" lIns="0" rIns="0" tIns="0" bIns="0" anchor="t">
+            <a:spAutoFit/>
+          </a:bodyPr>
+          <a:lstStyle/>
+          <a:p>
             <a:r>
               <a:rPr sz="1050" b="0" i="0">
                 <a:solidFill>
@@ -5006,7 +5322,7 @@
       </p:sp>
       <p:sp>
         <p:nvSpPr>
-          <p:cNvPr id="5" name="Rectangle 4"/>
+          <p:cNvPr id="6" name="Rectangle 5"/>
           <p:cNvSpPr/>
           <p:nvPr/>
         </p:nvSpPr>
@@ -5050,7 +5366,7 @@
       </p:sp>
       <p:sp>
         <p:nvSpPr>
-          <p:cNvPr id="6" name="TextBox 5"/>
+          <p:cNvPr id="7" name="TextBox 6"/>
           <p:cNvSpPr txBox="1"/>
           <p:nvPr/>
         </p:nvSpPr>
@@ -5085,7 +5401,7 @@
       </p:sp>
       <p:sp>
         <p:nvSpPr>
-          <p:cNvPr id="7" name="TextBox 6"/>
+          <p:cNvPr id="8" name="TextBox 7"/>
           <p:cNvSpPr txBox="1"/>
           <p:nvPr/>
         </p:nvSpPr>
@@ -5224,7 +5540,7 @@
       </p:sp>
       <p:sp>
         <p:nvSpPr>
-          <p:cNvPr id="8" name="Rounded Rectangle 7"/>
+          <p:cNvPr id="9" name="Rounded Rectangle 8"/>
           <p:cNvSpPr/>
           <p:nvPr/>
         </p:nvSpPr>
@@ -5272,7 +5588,7 @@
       </p:sp>
       <p:sp>
         <p:nvSpPr>
-          <p:cNvPr id="9" name="TextBox 8"/>
+          <p:cNvPr id="10" name="TextBox 9"/>
           <p:cNvSpPr txBox="1"/>
           <p:nvPr/>
         </p:nvSpPr>
@@ -5322,7 +5638,7 @@
       </p:sp>
       <p:sp>
         <p:nvSpPr>
-          <p:cNvPr id="10" name="TextBox 9"/>
+          <p:cNvPr id="11" name="TextBox 10"/>
           <p:cNvSpPr txBox="1"/>
           <p:nvPr/>
         </p:nvSpPr>
@@ -5361,7 +5677,7 @@
       </p:sp>
       <p:sp>
         <p:nvSpPr>
-          <p:cNvPr id="11" name="TextBox 10"/>
+          <p:cNvPr id="12" name="TextBox 11"/>
           <p:cNvSpPr txBox="1"/>
           <p:nvPr/>
         </p:nvSpPr>
@@ -5395,7 +5711,7 @@
       </p:sp>
       <p:sp>
         <p:nvSpPr>
-          <p:cNvPr id="12" name="TextBox 11"/>
+          <p:cNvPr id="13" name="TextBox 12"/>
           <p:cNvSpPr txBox="1"/>
           <p:nvPr/>
         </p:nvSpPr>
@@ -5419,7 +5735,7 @@
       </p:sp>
       <p:sp>
         <p:nvSpPr>
-          <p:cNvPr id="13" name="TextBox 12"/>
+          <p:cNvPr id="14" name="TextBox 13"/>
           <p:cNvSpPr txBox="1"/>
           <p:nvPr/>
         </p:nvSpPr>
@@ -5443,7 +5759,7 @@
       </p:sp>
       <p:sp>
         <p:nvSpPr>
-          <p:cNvPr id="14" name="TextBox 13"/>
+          <p:cNvPr id="15" name="TextBox 14"/>
           <p:cNvSpPr txBox="1"/>
           <p:nvPr/>
         </p:nvSpPr>
@@ -5478,7 +5794,7 @@
       </p:sp>
       <p:sp>
         <p:nvSpPr>
-          <p:cNvPr id="15" name="TextBox 14"/>
+          <p:cNvPr id="16" name="TextBox 15"/>
           <p:cNvSpPr txBox="1"/>
           <p:nvPr/>
         </p:nvSpPr>
@@ -5513,7 +5829,7 @@
       </p:sp>
       <p:sp>
         <p:nvSpPr>
-          <p:cNvPr id="16" name="Rectangle 15"/>
+          <p:cNvPr id="17" name="Rectangle 16"/>
           <p:cNvSpPr/>
           <p:nvPr/>
         </p:nvSpPr>
@@ -5557,7 +5873,7 @@
       </p:sp>
       <p:sp>
         <p:nvSpPr>
-          <p:cNvPr id="17" name="TextBox 16"/>
+          <p:cNvPr id="18" name="TextBox 17"/>
           <p:cNvSpPr txBox="1"/>
           <p:nvPr/>
         </p:nvSpPr>
@@ -5591,7 +5907,7 @@
       </p:sp>
       <p:sp>
         <p:nvSpPr>
-          <p:cNvPr id="18" name="TextBox 17"/>
+          <p:cNvPr id="19" name="TextBox 18"/>
           <p:cNvSpPr txBox="1"/>
           <p:nvPr/>
         </p:nvSpPr>
@@ -5626,7 +5942,7 @@
       </p:sp>
       <p:sp>
         <p:nvSpPr>
-          <p:cNvPr id="19" name="TextBox 18"/>
+          <p:cNvPr id="20" name="TextBox 19"/>
           <p:cNvSpPr txBox="1"/>
           <p:nvPr/>
         </p:nvSpPr>
@@ -5661,7 +5977,7 @@
       </p:sp>
       <p:sp>
         <p:nvSpPr>
-          <p:cNvPr id="20" name="Rectangle 19"/>
+          <p:cNvPr id="21" name="Rectangle 20"/>
           <p:cNvSpPr/>
           <p:nvPr/>
         </p:nvSpPr>
@@ -5705,7 +6021,7 @@
       </p:sp>
       <p:sp>
         <p:nvSpPr>
-          <p:cNvPr id="21" name="TextBox 20"/>
+          <p:cNvPr id="22" name="TextBox 21"/>
           <p:cNvSpPr txBox="1"/>
           <p:nvPr/>
         </p:nvSpPr>
@@ -5739,7 +6055,7 @@
       </p:sp>
       <p:sp>
         <p:nvSpPr>
-          <p:cNvPr id="22" name="TextBox 21"/>
+          <p:cNvPr id="23" name="TextBox 22"/>
           <p:cNvSpPr txBox="1"/>
           <p:nvPr/>
         </p:nvSpPr>
@@ -5774,7 +6090,7 @@
       </p:sp>
       <p:sp>
         <p:nvSpPr>
-          <p:cNvPr id="23" name="TextBox 22"/>
+          <p:cNvPr id="24" name="TextBox 23"/>
           <p:cNvSpPr txBox="1"/>
           <p:nvPr/>
         </p:nvSpPr>
@@ -5809,7 +6125,7 @@
       </p:sp>
       <p:sp>
         <p:nvSpPr>
-          <p:cNvPr id="24" name="Rectangle 23"/>
+          <p:cNvPr id="25" name="Rectangle 24"/>
           <p:cNvSpPr/>
           <p:nvPr/>
         </p:nvSpPr>
@@ -5853,7 +6169,7 @@
       </p:sp>
       <p:sp>
         <p:nvSpPr>
-          <p:cNvPr id="25" name="TextBox 24"/>
+          <p:cNvPr id="26" name="TextBox 25"/>
           <p:cNvSpPr txBox="1"/>
           <p:nvPr/>
         </p:nvSpPr>
@@ -5887,7 +6203,7 @@
       </p:sp>
       <p:sp>
         <p:nvSpPr>
-          <p:cNvPr id="26" name="TextBox 25"/>
+          <p:cNvPr id="27" name="TextBox 26"/>
           <p:cNvSpPr txBox="1"/>
           <p:nvPr/>
         </p:nvSpPr>
@@ -5922,7 +6238,7 @@
       </p:sp>
       <p:sp>
         <p:nvSpPr>
-          <p:cNvPr id="27" name="TextBox 26"/>
+          <p:cNvPr id="28" name="TextBox 27"/>
           <p:cNvSpPr txBox="1"/>
           <p:nvPr/>
         </p:nvSpPr>
@@ -5957,7 +6273,7 @@
       </p:sp>
       <p:sp>
         <p:nvSpPr>
-          <p:cNvPr id="28" name="Rectangle 27"/>
+          <p:cNvPr id="29" name="Rectangle 28"/>
           <p:cNvSpPr/>
           <p:nvPr/>
         </p:nvSpPr>
@@ -6001,7 +6317,7 @@
       </p:sp>
       <p:sp>
         <p:nvSpPr>
-          <p:cNvPr id="29" name="TextBox 28"/>
+          <p:cNvPr id="30" name="TextBox 29"/>
           <p:cNvSpPr txBox="1"/>
           <p:nvPr/>
         </p:nvSpPr>
@@ -6035,7 +6351,7 @@
       </p:sp>
       <p:sp>
         <p:nvSpPr>
-          <p:cNvPr id="30" name="TextBox 29"/>
+          <p:cNvPr id="31" name="TextBox 30"/>
           <p:cNvSpPr txBox="1"/>
           <p:nvPr/>
         </p:nvSpPr>
@@ -6070,7 +6386,7 @@
       </p:sp>
       <p:sp>
         <p:nvSpPr>
-          <p:cNvPr id="31" name="TextBox 30"/>
+          <p:cNvPr id="32" name="TextBox 31"/>
           <p:cNvSpPr txBox="1"/>
           <p:nvPr/>
         </p:nvSpPr>
@@ -6105,7 +6421,7 @@
       </p:sp>
       <p:sp>
         <p:nvSpPr>
-          <p:cNvPr id="32" name="Rectangle 31"/>
+          <p:cNvPr id="33" name="Rectangle 32"/>
           <p:cNvSpPr/>
           <p:nvPr/>
         </p:nvSpPr>
@@ -6149,7 +6465,7 @@
       </p:sp>
       <p:sp>
         <p:nvSpPr>
-          <p:cNvPr id="33" name="TextBox 32"/>
+          <p:cNvPr id="34" name="TextBox 33"/>
           <p:cNvSpPr txBox="1"/>
           <p:nvPr/>
         </p:nvSpPr>
@@ -6183,7 +6499,7 @@
       </p:sp>
       <p:sp>
         <p:nvSpPr>
-          <p:cNvPr id="34" name="TextBox 33"/>
+          <p:cNvPr id="35" name="TextBox 34"/>
           <p:cNvSpPr txBox="1"/>
           <p:nvPr/>
         </p:nvSpPr>
@@ -6218,7 +6534,7 @@
       </p:sp>
       <p:sp>
         <p:nvSpPr>
-          <p:cNvPr id="35" name="TextBox 34"/>
+          <p:cNvPr id="36" name="TextBox 35"/>
           <p:cNvSpPr txBox="1"/>
           <p:nvPr/>
         </p:nvSpPr>
@@ -6253,7 +6569,7 @@
       </p:sp>
       <p:sp>
         <p:nvSpPr>
-          <p:cNvPr id="36" name="Rectangle 35"/>
+          <p:cNvPr id="37" name="Rectangle 36"/>
           <p:cNvSpPr/>
           <p:nvPr/>
         </p:nvSpPr>
@@ -6297,7 +6613,7 @@
       </p:sp>
       <p:sp>
         <p:nvSpPr>
-          <p:cNvPr id="37" name="TextBox 36"/>
+          <p:cNvPr id="38" name="TextBox 37"/>
           <p:cNvSpPr txBox="1"/>
           <p:nvPr/>
         </p:nvSpPr>
@@ -6331,7 +6647,7 @@
       </p:sp>
       <p:sp>
         <p:nvSpPr>
-          <p:cNvPr id="38" name="TextBox 37"/>
+          <p:cNvPr id="39" name="TextBox 38"/>
           <p:cNvSpPr txBox="1"/>
           <p:nvPr/>
         </p:nvSpPr>
@@ -6366,7 +6682,7 @@
       </p:sp>
       <p:sp>
         <p:nvSpPr>
-          <p:cNvPr id="39" name="TextBox 38"/>
+          <p:cNvPr id="40" name="TextBox 39"/>
           <p:cNvSpPr txBox="1"/>
           <p:nvPr/>
         </p:nvSpPr>
@@ -6401,7 +6717,7 @@
       </p:sp>
       <p:pic>
         <p:nvPicPr>
-          <p:cNvPr id="40" name="Picture 39" descr="fig1_defect_families.png"/>
+          <p:cNvPr id="41" name="Picture 40" descr="fig1_defect_families.png"/>
           <p:cNvPicPr>
             <a:picLocks noChangeAspect="1"/>
           </p:cNvPicPr>
@@ -6415,8 +6731,8 @@
         </p:blipFill>
         <p:spPr>
           <a:xfrm>
-            <a:off x="792327" y="4572000"/>
-            <a:ext cx="10607040" cy="1719099"/>
+            <a:off x="502920" y="4590288"/>
+            <a:ext cx="8503920" cy="1762298"/>
           </a:xfrm>
           <a:prstGeom prst="rect">
             <a:avLst/>
@@ -6425,14 +6741,171 @@
       </p:pic>
       <p:sp>
         <p:nvSpPr>
-          <p:cNvPr id="41" name="TextBox 40"/>
+          <p:cNvPr id="42" name="Rounded Rectangle 41"/>
+          <p:cNvSpPr/>
+          <p:nvPr/>
+        </p:nvSpPr>
+        <p:spPr>
+          <a:xfrm>
+            <a:off x="9244584" y="4206240"/>
+            <a:ext cx="2444191" cy="2148840"/>
+          </a:xfrm>
+          <a:prstGeom prst="roundRect">
+            <a:avLst>
+              <a:gd name="adj" fmla="val 3000"/>
+            </a:avLst>
+          </a:prstGeom>
+          <a:solidFill>
+            <a:srgbClr val="FFFFFF"/>
+          </a:solidFill>
+          <a:ln w="9525">
+            <a:solidFill>
+              <a:srgbClr val="B4551F"/>
+            </a:solidFill>
+          </a:ln>
+          <a:effectLst/>
+        </p:spPr>
+        <p:style>
+          <a:lnRef idx="1">
+            <a:schemeClr val="accent1"/>
+          </a:lnRef>
+          <a:fillRef idx="3">
+            <a:schemeClr val="accent1"/>
+          </a:fillRef>
+          <a:effectRef idx="2">
+            <a:schemeClr val="accent1"/>
+          </a:effectRef>
+          <a:fontRef idx="minor">
+            <a:schemeClr val="lt1"/>
+          </a:fontRef>
+        </p:style>
+        <p:txBody>
+          <a:bodyPr rtlCol="0" anchor="ctr"/>
+          <a:lstStyle/>
+          <a:p>
+            <a:pPr algn="ctr"/>
+          </a:p>
+        </p:txBody>
+      </p:sp>
+      <p:sp>
+        <p:nvSpPr>
+          <p:cNvPr id="43" name="TextBox 42"/>
           <p:cNvSpPr txBox="1"/>
           <p:nvPr/>
         </p:nvSpPr>
         <p:spPr>
           <a:xfrm>
-            <a:off x="502920" y="6437376"/>
-            <a:ext cx="11185855" cy="310896"/>
+            <a:off x="9372600" y="4315968"/>
+            <a:ext cx="2188159" cy="384048"/>
+          </a:xfrm>
+          <a:prstGeom prst="rect">
+            <a:avLst/>
+          </a:prstGeom>
+          <a:noFill/>
+        </p:spPr>
+        <p:txBody>
+          <a:bodyPr wrap="square" lIns="0" rIns="0" tIns="0" bIns="0" anchor="t">
+            <a:spAutoFit/>
+          </a:bodyPr>
+          <a:lstStyle/>
+          <a:p>
+            <a:pPr algn="ctr">
+              <a:spcAft>
+                <a:spcPts val="300"/>
+              </a:spcAft>
+            </a:pPr>
+            <a:r>
+              <a:rPr sz="760" b="1" i="0">
+                <a:solidFill>
+                  <a:srgbClr val="B4551F"/>
+                </a:solidFill>
+                <a:latin typeface="Arial"/>
+              </a:rPr>
+              <a:t>OPEN IT WHILE YOU READ</a:t>
+            </a:r>
+          </a:p>
+          <a:p>
+            <a:pPr algn="ctr"/>
+            <a:r>
+              <a:rPr sz="1350" b="1" i="0">
+                <a:solidFill>
+                  <a:srgbClr val="141C24"/>
+                </a:solidFill>
+                <a:latin typeface="Arial"/>
+              </a:rPr>
+              <a:t>surface-vision.github.io</a:t>
+            </a:r>
+          </a:p>
+        </p:txBody>
+      </p:sp>
+      <p:pic>
+        <p:nvPicPr>
+          <p:cNvPr id="44" name="Picture 43" descr="fig7_live_demo_qr.png"/>
+          <p:cNvPicPr>
+            <a:picLocks noChangeAspect="1"/>
+          </p:cNvPicPr>
+          <p:nvPr/>
+        </p:nvPicPr>
+        <p:blipFill>
+          <a:blip r:embed="rId3"/>
+          <a:stretch>
+            <a:fillRect/>
+          </a:stretch>
+        </p:blipFill>
+        <p:spPr>
+          <a:xfrm>
+            <a:off x="9986619" y="4700016"/>
+            <a:ext cx="960120" cy="960120"/>
+          </a:xfrm>
+          <a:prstGeom prst="rect">
+            <a:avLst/>
+          </a:prstGeom>
+        </p:spPr>
+      </p:pic>
+      <p:sp>
+        <p:nvSpPr>
+          <p:cNvPr id="45" name="TextBox 44"/>
+          <p:cNvSpPr txBox="1"/>
+          <p:nvPr/>
+        </p:nvSpPr>
+        <p:spPr>
+          <a:xfrm>
+            <a:off x="9372600" y="5696712"/>
+            <a:ext cx="2188159" cy="621792"/>
+          </a:xfrm>
+          <a:prstGeom prst="rect">
+            <a:avLst/>
+          </a:prstGeom>
+          <a:noFill/>
+        </p:spPr>
+        <p:txBody>
+          <a:bodyPr wrap="square" lIns="0" rIns="0" tIns="0" bIns="0" anchor="t">
+            <a:spAutoFit/>
+          </a:bodyPr>
+          <a:lstStyle/>
+          <a:p>
+            <a:r>
+              <a:rPr sz="760" b="0" i="0">
+                <a:solidFill>
+                  <a:srgbClr val="33414F"/>
+                </a:solidFill>
+                <a:latin typeface="Arial"/>
+              </a:rPr>
+              <a:t>The real detector, not a recording: the 12.1 MB ONNX export of the shipped weights runs in your tab on the WASM backend. No install, no sign-in, nothing uploaded. Twelve held-out frames built in, or drop your own.</a:t>
+            </a:r>
+          </a:p>
+        </p:txBody>
+      </p:sp>
+      <p:sp>
+        <p:nvSpPr>
+          <p:cNvPr id="46" name="TextBox 45"/>
+          <p:cNvSpPr txBox="1"/>
+          <p:nvPr/>
+        </p:nvSpPr>
+        <p:spPr>
+          <a:xfrm>
+            <a:off x="502920" y="6391656"/>
+            <a:ext cx="11185855" cy="402336"/>
           </a:xfrm>
           <a:prstGeom prst="rect">
             <a:avLst/>
@@ -6457,7 +6930,7 @@
                 </a:solidFill>
                 <a:latin typeface="Arial"/>
               </a:rPr>
-              <a:t>MEASURED is the shipped checkpoint, in production today. A joint checkpoint ships alongside it, scoring 0.7642 on the same split while fixing a cross-domain false-alarm problem the shipped model has -- see slide 3.</a:t>
+              <a:t>MEASURED is the shipped checkpoint, in production today, and it is the checkpoint the QR code opens. A joint checkpoint ships alongside it, scoring 0.7642 on the same split while fixing a cross-domain false-alarm problem -- see slide 3.</a:t>
             </a:r>
           </a:p>
           <a:p>
@@ -6468,7 +6941,7 @@
                 </a:solidFill>
                 <a:latin typeface="Arial"/>
               </a:rPr>
-              <a:t>Sources: reports/model_study.json - reports/false_alarm.json - reports/gap1_cross_domain_fix.md - docs/research_notes.md s2a (AMETEK/Ternium, [HARD]), s2b (ISRA, [VENDOR]), s4a (IISE, [HARD] / stainless pricing [SECONDARY]).</a:t>
+              <a:t>Sources: reports/model_study.json - reports/false_alarm.json - reports/gap1_cross_domain_fix.md - site/verify/parity_browser.json - deck/build/live_demo_check.json (live page, HTTP 200, 2026-09-10) - docs/research_notes.md s2a (AMETEK/Ternium, [HARD]), s2b (ISRA, [VENDOR]), s4a (IISE, [HARD] / stainless pricing [SECONDARY]).</a:t>
             </a:r>
           </a:p>
         </p:txBody>
@@ -6535,7 +7008,7 @@
         <p:spPr>
           <a:xfrm>
             <a:off x="502920" y="292608"/>
-            <a:ext cx="10454335" cy="256032"/>
+            <a:ext cx="6583680" cy="256032"/>
           </a:xfrm>
           <a:prstGeom prst="rect">
             <a:avLst/>
@@ -6568,8 +7041,8 @@
         </p:nvSpPr>
         <p:spPr>
           <a:xfrm>
-            <a:off x="502920" y="996696"/>
-            <a:ext cx="11185855" cy="201168"/>
+            <a:off x="7269480" y="274320"/>
+            <a:ext cx="3657600" cy="237744"/>
           </a:xfrm>
           <a:prstGeom prst="rect">
             <a:avLst/>
@@ -6582,6 +7055,50 @@
           </a:bodyPr>
           <a:lstStyle/>
           <a:p>
+            <a:pPr algn="r"/>
+            <a:r>
+              <a:rPr sz="800" b="1" i="0">
+                <a:solidFill>
+                  <a:srgbClr val="6B7885"/>
+                </a:solidFill>
+                <a:latin typeface="Arial"/>
+              </a:rPr>
+              <a:t>RUNS LIVE IN YOUR BROWSER   </a:t>
+            </a:r>
+            <a:r>
+              <a:rPr sz="1200" b="1" i="0">
+                <a:solidFill>
+                  <a:srgbClr val="B4551F"/>
+                </a:solidFill>
+                <a:latin typeface="Arial"/>
+              </a:rPr>
+              <a:t>surface-vision.github.io</a:t>
+            </a:r>
+          </a:p>
+        </p:txBody>
+      </p:sp>
+      <p:sp>
+        <p:nvSpPr>
+          <p:cNvPr id="5" name="TextBox 4"/>
+          <p:cNvSpPr txBox="1"/>
+          <p:nvPr/>
+        </p:nvSpPr>
+        <p:spPr>
+          <a:xfrm>
+            <a:off x="502920" y="996696"/>
+            <a:ext cx="11185855" cy="201168"/>
+          </a:xfrm>
+          <a:prstGeom prst="rect">
+            <a:avLst/>
+          </a:prstGeom>
+          <a:noFill/>
+        </p:spPr>
+        <p:txBody>
+          <a:bodyPr wrap="square" lIns="0" rIns="0" tIns="0" bIns="0" anchor="t">
+            <a:spAutoFit/>
+          </a:bodyPr>
+          <a:lstStyle/>
+          <a:p>
             <a:r>
               <a:rPr sz="1050" b="0" i="0">
                 <a:solidFill>
@@ -6596,7 +7113,7 @@
       </p:sp>
       <p:sp>
         <p:nvSpPr>
-          <p:cNvPr id="5" name="Rectangle 4"/>
+          <p:cNvPr id="6" name="Rectangle 5"/>
           <p:cNvSpPr/>
           <p:nvPr/>
         </p:nvSpPr>
@@ -6640,7 +7157,7 @@
       </p:sp>
       <p:sp>
         <p:nvSpPr>
-          <p:cNvPr id="6" name="TextBox 5"/>
+          <p:cNvPr id="7" name="TextBox 6"/>
           <p:cNvSpPr txBox="1"/>
           <p:nvPr/>
         </p:nvSpPr>
@@ -6675,7 +7192,7 @@
       </p:sp>
       <p:pic>
         <p:nvPicPr>
-          <p:cNvPr id="7" name="Picture 6" descr="fig2_architecture.png"/>
+          <p:cNvPr id="8" name="Picture 7" descr="fig2_architecture.png"/>
           <p:cNvPicPr>
             <a:picLocks noChangeAspect="1"/>
           </p:cNvPicPr>
@@ -6689,7 +7206,7 @@
         </p:blipFill>
         <p:spPr>
           <a:xfrm>
-            <a:off x="502920" y="1389888"/>
+            <a:off x="502920" y="1335024"/>
             <a:ext cx="11185855" cy="2381024"/>
           </a:xfrm>
           <a:prstGeom prst="rect">
@@ -6699,13 +7216,13 @@
       </p:pic>
       <p:sp>
         <p:nvSpPr>
-          <p:cNvPr id="8" name="TextBox 7"/>
+          <p:cNvPr id="9" name="TextBox 8"/>
           <p:cNvSpPr txBox="1"/>
           <p:nvPr/>
         </p:nvSpPr>
         <p:spPr>
           <a:xfrm>
-            <a:off x="502920" y="3858768"/>
+            <a:off x="502920" y="3767328"/>
             <a:ext cx="4892040" cy="2084831"/>
           </a:xfrm>
           <a:prstGeom prst="rect">
@@ -6737,7 +7254,7 @@
           <a:p>
             <a:pPr>
               <a:spcAft>
-                <a:spcPts val="550"/>
+                <a:spcPts val="520"/>
               </a:spcAft>
             </a:pPr>
             <a:r>
@@ -6762,7 +7279,7 @@
           <a:p>
             <a:pPr>
               <a:spcAft>
-                <a:spcPts val="550"/>
+                <a:spcPts val="520"/>
               </a:spcAft>
             </a:pPr>
             <a:r>
@@ -6787,7 +7304,7 @@
           <a:p>
             <a:pPr>
               <a:spcAft>
-                <a:spcPts val="550"/>
+                <a:spcPts val="520"/>
               </a:spcAft>
             </a:pPr>
             <a:r>
@@ -6812,7 +7329,7 @@
           <a:p>
             <a:pPr>
               <a:spcAft>
-                <a:spcPts val="550"/>
+                <a:spcPts val="520"/>
               </a:spcAft>
             </a:pPr>
             <a:r>
@@ -6837,7 +7354,7 @@
           <a:p>
             <a:pPr>
               <a:spcAft>
-                <a:spcPts val="550"/>
+                <a:spcPts val="520"/>
               </a:spcAft>
             </a:pPr>
             <a:r>
@@ -6863,14 +7380,14 @@
       </p:sp>
       <p:sp>
         <p:nvSpPr>
-          <p:cNvPr id="9" name="Rounded Rectangle 8"/>
+          <p:cNvPr id="10" name="Rounded Rectangle 9"/>
           <p:cNvSpPr/>
           <p:nvPr/>
         </p:nvSpPr>
         <p:spPr>
           <a:xfrm>
-            <a:off x="502920" y="5980175"/>
-            <a:ext cx="4892040" cy="420624"/>
+            <a:off x="502920" y="5888736"/>
+            <a:ext cx="4892040" cy="566928"/>
           </a:xfrm>
           <a:prstGeom prst="roundRect">
             <a:avLst>
@@ -6911,14 +7428,14 @@
       </p:sp>
       <p:sp>
         <p:nvSpPr>
-          <p:cNvPr id="10" name="TextBox 9"/>
+          <p:cNvPr id="11" name="TextBox 10"/>
           <p:cNvSpPr txBox="1"/>
           <p:nvPr/>
         </p:nvSpPr>
         <p:spPr>
           <a:xfrm>
-            <a:off x="630936" y="6071615"/>
-            <a:ext cx="4636007" cy="292608"/>
+            <a:off x="630936" y="5961888"/>
+            <a:ext cx="4636007" cy="429768"/>
           </a:xfrm>
           <a:prstGeom prst="rect">
             <a:avLst/>
@@ -6938,14 +7455,32 @@
                 </a:solidFill>
                 <a:latin typeface="Arial"/>
               </a:rPr>
-              <a:t>Ships today: the checkpoint plus its cross-domain-fix twin, calibrated confidence, an OOD gate, a verified ONNX/CoreML export, a Streamlit console, a coil report, and 540 passing tests.</a:t>
+              <a:t>Ships today: the checkpoint and its cross-domain-fix twin, calibrated confidence, an OOD gate, a verified ONNX/CoreML export, a Streamlit console, a coil report, 540 passing tests, and this detector stage running client-side at </a:t>
+            </a:r>
+            <a:r>
+              <a:rPr sz="860" b="1" i="0">
+                <a:solidFill>
+                  <a:srgbClr val="B4551F"/>
+                </a:solidFill>
+                <a:latin typeface="Arial"/>
+              </a:rPr>
+              <a:t>surface-vision.github.io</a:t>
+            </a:r>
+            <a:r>
+              <a:rPr sz="860" b="0" i="0">
+                <a:solidFill>
+                  <a:srgbClr val="33414F"/>
+                </a:solidFill>
+                <a:latin typeface="Arial"/>
+              </a:rPr>
+              <a:t>.</a:t>
             </a:r>
           </a:p>
         </p:txBody>
       </p:sp>
       <p:pic>
         <p:nvPicPr>
-          <p:cNvPr id="11" name="Picture 10" descr="fig3_throughput.png"/>
+          <p:cNvPr id="12" name="Picture 11" descr="fig3_throughput.png"/>
           <p:cNvPicPr>
             <a:picLocks noChangeAspect="1"/>
           </p:cNvPicPr>
@@ -6969,7 +7504,7 @@
       </p:pic>
       <p:sp>
         <p:nvSpPr>
-          <p:cNvPr id="12" name="TextBox 11"/>
+          <p:cNvPr id="13" name="TextBox 12"/>
           <p:cNvSpPr txBox="1"/>
           <p:nvPr/>
         </p:nvSpPr>
@@ -6996,7 +7531,7 @@
                 </a:solidFill>
                 <a:latin typeface="Arial"/>
               </a:rPr>
-              <a:t>Sources: reports/benchmark.json (mill.geometry, mill.deployment, mill.scenarios) - reports/model_study.json - reports/operating_point.json - reports/export_summary.json - reports/calibration.md - reports/ood_guard.md - `.venv/bin/python -m pytest tests/ -q` -&gt; 540 passed, 8 skipped.</a:t>
+              <a:t>Sources: reports/benchmark.json (mill.geometry, mill.deployment, mill.scenarios) - reports/model_study.json - reports/operating_point.json - reports/export_summary.json - reports/calibration.md - reports/ood_guard.md - site/verify/parity_report.json - `.venv/bin/python -m pytest tests/ -q` -&gt; 540 passed, 8 skipped. Live: https://surface-vision.github.io</a:t>
             </a:r>
           </a:p>
         </p:txBody>
@@ -7063,7 +7598,7 @@
         <p:spPr>
           <a:xfrm>
             <a:off x="502920" y="292608"/>
-            <a:ext cx="10454335" cy="256032"/>
+            <a:ext cx="6583680" cy="256032"/>
           </a:xfrm>
           <a:prstGeom prst="rect">
             <a:avLst/>
@@ -7096,8 +7631,8 @@
         </p:nvSpPr>
         <p:spPr>
           <a:xfrm>
-            <a:off x="502920" y="996696"/>
-            <a:ext cx="11185855" cy="201168"/>
+            <a:off x="7269480" y="274320"/>
+            <a:ext cx="3657600" cy="237744"/>
           </a:xfrm>
           <a:prstGeom prst="rect">
             <a:avLst/>
@@ -7110,6 +7645,50 @@
           </a:bodyPr>
           <a:lstStyle/>
           <a:p>
+            <a:pPr algn="r"/>
+            <a:r>
+              <a:rPr sz="800" b="1" i="0">
+                <a:solidFill>
+                  <a:srgbClr val="6B7885"/>
+                </a:solidFill>
+                <a:latin typeface="Arial"/>
+              </a:rPr>
+              <a:t>RUNS LIVE IN YOUR BROWSER   </a:t>
+            </a:r>
+            <a:r>
+              <a:rPr sz="1200" b="1" i="0">
+                <a:solidFill>
+                  <a:srgbClr val="B4551F"/>
+                </a:solidFill>
+                <a:latin typeface="Arial"/>
+              </a:rPr>
+              <a:t>surface-vision.github.io</a:t>
+            </a:r>
+          </a:p>
+        </p:txBody>
+      </p:sp>
+      <p:sp>
+        <p:nvSpPr>
+          <p:cNvPr id="5" name="TextBox 4"/>
+          <p:cNvSpPr txBox="1"/>
+          <p:nvPr/>
+        </p:nvSpPr>
+        <p:spPr>
+          <a:xfrm>
+            <a:off x="502920" y="996696"/>
+            <a:ext cx="11185855" cy="201168"/>
+          </a:xfrm>
+          <a:prstGeom prst="rect">
+            <a:avLst/>
+          </a:prstGeom>
+          <a:noFill/>
+        </p:spPr>
+        <p:txBody>
+          <a:bodyPr wrap="square" lIns="0" rIns="0" tIns="0" bIns="0" anchor="t">
+            <a:spAutoFit/>
+          </a:bodyPr>
+          <a:lstStyle/>
+          <a:p>
             <a:r>
               <a:rPr sz="1050" b="0" i="0">
                 <a:solidFill>
@@ -7124,7 +7703,7 @@
       </p:sp>
       <p:sp>
         <p:nvSpPr>
-          <p:cNvPr id="5" name="Rectangle 4"/>
+          <p:cNvPr id="6" name="Rectangle 5"/>
           <p:cNvSpPr/>
           <p:nvPr/>
         </p:nvSpPr>
@@ -7168,7 +7747,7 @@
       </p:sp>
       <p:sp>
         <p:nvSpPr>
-          <p:cNvPr id="6" name="TextBox 5"/>
+          <p:cNvPr id="7" name="TextBox 6"/>
           <p:cNvSpPr txBox="1"/>
           <p:nvPr/>
         </p:nvSpPr>
@@ -7203,7 +7782,7 @@
       </p:sp>
       <p:pic>
         <p:nvPicPr>
-          <p:cNvPr id="7" name="Picture 6" descr="fig4_validation.png"/>
+          <p:cNvPr id="8" name="Picture 7" descr="fig4_validation.png"/>
           <p:cNvPicPr>
             <a:picLocks noChangeAspect="1"/>
           </p:cNvPicPr>
@@ -7217,8 +7796,8 @@
         </p:blipFill>
         <p:spPr>
           <a:xfrm>
-            <a:off x="502920" y="1371600"/>
-            <a:ext cx="11185855" cy="3017617"/>
+            <a:off x="502920" y="1335024"/>
+            <a:ext cx="11185855" cy="2600111"/>
           </a:xfrm>
           <a:prstGeom prst="rect">
             <a:avLst/>
@@ -7227,14 +7806,14 @@
       </p:pic>
       <p:sp>
         <p:nvSpPr>
-          <p:cNvPr id="8" name="TextBox 7"/>
+          <p:cNvPr id="9" name="TextBox 8"/>
           <p:cNvSpPr txBox="1"/>
           <p:nvPr/>
         </p:nvSpPr>
         <p:spPr>
           <a:xfrm>
-            <a:off x="502920" y="4480560"/>
-            <a:ext cx="3515258" cy="1975104"/>
+            <a:off x="502920" y="4059936"/>
+            <a:ext cx="3515258" cy="2395728"/>
           </a:xfrm>
           <a:prstGeom prst="rect">
             <a:avLst/>
@@ -7362,18 +7941,61 @@
               <a:t>Input pipeline: lossless padding (no resampling) was tested against scaling to 256 px and lost by 0.024-0.052 mAP50 on every checkpoint and split -- scaling stays.</a:t>
             </a:r>
           </a:p>
-        </p:txBody>
-      </p:sp>
-      <p:sp>
-        <p:nvSpPr>
-          <p:cNvPr id="9" name="TextBox 8"/>
+          <a:p>
+            <a:pPr>
+              <a:spcAft>
+                <a:spcPts val="380"/>
+              </a:spcAft>
+            </a:pPr>
+            <a:r>
+              <a:rPr sz="810" b="1" i="0">
+                <a:solidFill>
+                  <a:srgbClr val="1F4E6B"/>
+                </a:solidFill>
+                <a:latin typeface="Arial"/>
+              </a:rPr>
+              <a:t>—  </a:t>
+            </a:r>
+            <a:r>
+              <a:rPr sz="810" b="0" i="0">
+                <a:solidFill>
+                  <a:srgbClr val="33414F"/>
+                </a:solidFill>
+                <a:latin typeface="Arial"/>
+              </a:rPr>
+              <a:t>Re-runnable live: the ONNX export of these same weights, at </a:t>
+            </a:r>
+            <a:r>
+              <a:rPr sz="810" b="1" i="0">
+                <a:solidFill>
+                  <a:srgbClr val="B4551F"/>
+                </a:solidFill>
+                <a:latin typeface="Arial"/>
+              </a:rPr>
+              <a:t>surface-vision.github.io</a:t>
+            </a:r>
+            <a:r>
+              <a:rPr sz="810" b="0" i="0">
+                <a:solidFill>
+                  <a:srgbClr val="33414F"/>
+                </a:solidFill>
+                <a:latin typeface="Arial"/>
+              </a:rPr>
+              <a:t>, reproduces the PyTorch reference on 40 of 40 detections over 12 held-out frames, max box error 0.14 px.</a:t>
+            </a:r>
+          </a:p>
+        </p:txBody>
+      </p:sp>
+      <p:sp>
+        <p:nvSpPr>
+          <p:cNvPr id="10" name="TextBox 9"/>
           <p:cNvSpPr txBox="1"/>
           <p:nvPr/>
         </p:nvSpPr>
         <p:spPr>
           <a:xfrm>
-            <a:off x="4338218" y="4480560"/>
-            <a:ext cx="3515258" cy="1975104"/>
+            <a:off x="4338218" y="4059936"/>
+            <a:ext cx="3515258" cy="2395728"/>
           </a:xfrm>
           <a:prstGeom prst="rect">
             <a:avLst/>
@@ -7505,14 +8127,14 @@
       </p:sp>
       <p:sp>
         <p:nvSpPr>
-          <p:cNvPr id="10" name="TextBox 9"/>
+          <p:cNvPr id="11" name="TextBox 10"/>
           <p:cNvSpPr txBox="1"/>
           <p:nvPr/>
         </p:nvSpPr>
         <p:spPr>
           <a:xfrm>
-            <a:off x="8173516" y="4480560"/>
-            <a:ext cx="3515258" cy="1975104"/>
+            <a:off x="8173516" y="4059936"/>
+            <a:ext cx="3515258" cy="2395728"/>
           </a:xfrm>
           <a:prstGeom prst="rect">
             <a:avLst/>
@@ -7644,7 +8266,7 @@
       </p:sp>
       <p:sp>
         <p:nvSpPr>
-          <p:cNvPr id="11" name="TextBox 10"/>
+          <p:cNvPr id="12" name="TextBox 11"/>
           <p:cNvSpPr txBox="1"/>
           <p:nvPr/>
         </p:nvSpPr>
@@ -7671,7 +8293,7 @@
                 </a:solidFill>
                 <a:latin typeface="Arial"/>
               </a:rPr>
-              <a:t>Sources: reports/gap1_cross_domain_fix.md (in-domain, cross-domain, coil disposition) - reports/gap1_cross_domain.json - reports/gap1_detection_metrics.json - reports/resolution_study.md - reports/input_pipeline_decision.md - reports/gc10_coverage.md - reports/model_study.json - reports/false_alarm.json. Reproduction commands for both headline numbers are in the speaker notes.</a:t>
+              <a:t>Sources: reports/gap1_cross_domain_fix.md (in-domain, cross-domain, coil disposition) - reports/gap1_cross_domain.json - reports/gap1_detection_metrics.json - reports/resolution_study.md - reports/input_pipeline_decision.md - reports/gc10_coverage.md - reports/model_study.json - reports/false_alarm.json - site/verify/parity_browser.json (40/40 in Chrome, at https://surface-vision.github.io). Reproduction commands for the headline numbers are in the speaker notes.</a:t>
             </a:r>
           </a:p>
         </p:txBody>
@@ -7738,7 +8360,7 @@
         <p:spPr>
           <a:xfrm>
             <a:off x="502920" y="292608"/>
-            <a:ext cx="10454335" cy="256032"/>
+            <a:ext cx="6583680" cy="256032"/>
           </a:xfrm>
           <a:prstGeom prst="rect">
             <a:avLst/>
@@ -7771,8 +8393,8 @@
         </p:nvSpPr>
         <p:spPr>
           <a:xfrm>
-            <a:off x="502920" y="996696"/>
-            <a:ext cx="11185855" cy="201168"/>
+            <a:off x="7269480" y="274320"/>
+            <a:ext cx="3657600" cy="237744"/>
           </a:xfrm>
           <a:prstGeom prst="rect">
             <a:avLst/>
@@ -7785,6 +8407,50 @@
           </a:bodyPr>
           <a:lstStyle/>
           <a:p>
+            <a:pPr algn="r"/>
+            <a:r>
+              <a:rPr sz="800" b="1" i="0">
+                <a:solidFill>
+                  <a:srgbClr val="6B7885"/>
+                </a:solidFill>
+                <a:latin typeface="Arial"/>
+              </a:rPr>
+              <a:t>RUNS LIVE IN YOUR BROWSER   </a:t>
+            </a:r>
+            <a:r>
+              <a:rPr sz="1200" b="1" i="0">
+                <a:solidFill>
+                  <a:srgbClr val="B4551F"/>
+                </a:solidFill>
+                <a:latin typeface="Arial"/>
+              </a:rPr>
+              <a:t>surface-vision.github.io</a:t>
+            </a:r>
+          </a:p>
+        </p:txBody>
+      </p:sp>
+      <p:sp>
+        <p:nvSpPr>
+          <p:cNvPr id="5" name="TextBox 4"/>
+          <p:cNvSpPr txBox="1"/>
+          <p:nvPr/>
+        </p:nvSpPr>
+        <p:spPr>
+          <a:xfrm>
+            <a:off x="502920" y="996696"/>
+            <a:ext cx="11185855" cy="201168"/>
+          </a:xfrm>
+          <a:prstGeom prst="rect">
+            <a:avLst/>
+          </a:prstGeom>
+          <a:noFill/>
+        </p:spPr>
+        <p:txBody>
+          <a:bodyPr wrap="square" lIns="0" rIns="0" tIns="0" bIns="0" anchor="t">
+            <a:spAutoFit/>
+          </a:bodyPr>
+          <a:lstStyle/>
+          <a:p>
             <a:r>
               <a:rPr sz="1050" b="0" i="0">
                 <a:solidFill>
@@ -7799,7 +8465,7 @@
       </p:sp>
       <p:sp>
         <p:nvSpPr>
-          <p:cNvPr id="5" name="Rectangle 4"/>
+          <p:cNvPr id="6" name="Rectangle 5"/>
           <p:cNvSpPr/>
           <p:nvPr/>
         </p:nvSpPr>
@@ -7843,7 +8509,7 @@
       </p:sp>
       <p:sp>
         <p:nvSpPr>
-          <p:cNvPr id="6" name="TextBox 5"/>
+          <p:cNvPr id="7" name="TextBox 6"/>
           <p:cNvSpPr txBox="1"/>
           <p:nvPr/>
         </p:nvSpPr>
@@ -7878,7 +8544,7 @@
       </p:sp>
       <p:pic>
         <p:nvPicPr>
-          <p:cNvPr id="7" name="Picture 6" descr="fig5_capacity.png"/>
+          <p:cNvPr id="8" name="Picture 7" descr="fig5_capacity.png"/>
           <p:cNvPicPr>
             <a:picLocks noChangeAspect="1"/>
           </p:cNvPicPr>
@@ -7892,8 +8558,8 @@
         </p:blipFill>
         <p:spPr>
           <a:xfrm>
-            <a:off x="502920" y="1371600"/>
-            <a:ext cx="5897880" cy="2539538"/>
+            <a:off x="502920" y="1335024"/>
+            <a:ext cx="5897880" cy="2148840"/>
           </a:xfrm>
           <a:prstGeom prst="rect">
             <a:avLst/>
@@ -7902,14 +8568,14 @@
       </p:pic>
       <p:sp>
         <p:nvSpPr>
-          <p:cNvPr id="8" name="TextBox 7"/>
+          <p:cNvPr id="9" name="TextBox 8"/>
           <p:cNvSpPr txBox="1"/>
           <p:nvPr/>
         </p:nvSpPr>
         <p:spPr>
           <a:xfrm>
-            <a:off x="502920" y="3968496"/>
-            <a:ext cx="5897880" cy="2331720"/>
+            <a:off x="502920" y="3474720"/>
+            <a:ext cx="5897880" cy="2889504"/>
           </a:xfrm>
           <a:prstGeom prst="rect">
             <a:avLst/>
@@ -7940,7 +8606,7 @@
           <a:p>
             <a:pPr>
               <a:spcAft>
-                <a:spcPts val="400"/>
+                <a:spcPts val="360"/>
               </a:spcAft>
             </a:pPr>
             <a:r>
@@ -7965,7 +8631,7 @@
           <a:p>
             <a:pPr>
               <a:spcAft>
-                <a:spcPts val="400"/>
+                <a:spcPts val="360"/>
               </a:spcAft>
             </a:pPr>
             <a:r>
@@ -7990,7 +8656,7 @@
           <a:p>
             <a:pPr>
               <a:spcAft>
-                <a:spcPts val="400"/>
+                <a:spcPts val="360"/>
               </a:spcAft>
             </a:pPr>
             <a:r>
@@ -8015,7 +8681,7 @@
           <a:p>
             <a:pPr>
               <a:spcAft>
-                <a:spcPts val="400"/>
+                <a:spcPts val="360"/>
               </a:spcAft>
             </a:pPr>
             <a:r>
@@ -8040,7 +8706,7 @@
           <a:p>
             <a:pPr>
               <a:spcAft>
-                <a:spcPts val="400"/>
+                <a:spcPts val="360"/>
               </a:spcAft>
             </a:pPr>
             <a:r>
@@ -8065,7 +8731,7 @@
           <a:p>
             <a:pPr>
               <a:spcAft>
-                <a:spcPts val="400"/>
+                <a:spcPts val="360"/>
               </a:spcAft>
             </a:pPr>
             <a:r>
@@ -8087,18 +8753,61 @@
               <a:t>YOLO by argument, not by default. On this dataset the published out-of-the-box transformer numbers are DETR 25.2 and RT-DETR 55.0 mAP50 against YOLOv11's 71.6.</a:t>
             </a:r>
           </a:p>
-        </p:txBody>
-      </p:sp>
-      <p:sp>
-        <p:nvSpPr>
-          <p:cNvPr id="9" name="Rounded Rectangle 8"/>
+          <a:p>
+            <a:pPr>
+              <a:spcAft>
+                <a:spcPts val="360"/>
+              </a:spcAft>
+            </a:pPr>
+            <a:r>
+              <a:rPr sz="869" b="1" i="0">
+                <a:solidFill>
+                  <a:srgbClr val="1F4E6B"/>
+                </a:solidFill>
+                <a:latin typeface="Arial"/>
+              </a:rPr>
+              <a:t>7   </a:t>
+            </a:r>
+            <a:r>
+              <a:rPr sz="869" b="0" i="0">
+                <a:solidFill>
+                  <a:srgbClr val="33414F"/>
+                </a:solidFill>
+                <a:latin typeface="Arial"/>
+              </a:rPr>
+              <a:t>Deployable where the data is. The detector is 6.22 MB as PyTorch, 12.1 MB as ONNX, and runs client-side at </a:t>
+            </a:r>
+            <a:r>
+              <a:rPr sz="869" b="1" i="0">
+                <a:solidFill>
+                  <a:srgbClr val="B4551F"/>
+                </a:solidFill>
+                <a:latin typeface="Arial"/>
+              </a:rPr>
+              <a:t>surface-vision.github.io</a:t>
+            </a:r>
+            <a:r>
+              <a:rPr sz="869" b="0" i="0">
+                <a:solidFill>
+                  <a:srgbClr val="33414F"/>
+                </a:solidFill>
+                <a:latin typeface="Arial"/>
+              </a:rPr>
+              <a:t> -- real Chrome, WASM, one thread, 31.7 ms median per frame, 40 of 40 detections identical to PyTorch within 0.14 px. No strip image leaves the plant, no cloud, no per-inference cost, no cold start. A proof of deployability, not a proposal to inspect coil in a browser tab.</a:t>
+            </a:r>
+          </a:p>
+        </p:txBody>
+      </p:sp>
+      <p:sp>
+        <p:nvSpPr>
+          <p:cNvPr id="10" name="Rounded Rectangle 9"/>
           <p:cNvSpPr/>
           <p:nvPr/>
         </p:nvSpPr>
         <p:spPr>
           <a:xfrm>
-            <a:off x="6601968" y="1371600"/>
-            <a:ext cx="5233111" cy="4901184"/>
+            <a:off x="6601968" y="1335024"/>
+            <a:ext cx="5233111" cy="5029200"/>
           </a:xfrm>
           <a:prstGeom prst="roundRect">
             <a:avLst>
@@ -8139,14 +8848,14 @@
       </p:sp>
       <p:sp>
         <p:nvSpPr>
-          <p:cNvPr id="10" name="TextBox 9"/>
+          <p:cNvPr id="11" name="TextBox 10"/>
           <p:cNvSpPr txBox="1"/>
           <p:nvPr/>
         </p:nvSpPr>
         <p:spPr>
           <a:xfrm>
-            <a:off x="6748272" y="1517904"/>
-            <a:ext cx="4940503" cy="4617720"/>
+            <a:off x="6748272" y="1481328"/>
+            <a:ext cx="4940503" cy="4773168"/>
           </a:xfrm>
           <a:prstGeom prst="rect">
             <a:avLst/>
@@ -8177,7 +8886,7 @@
           <a:p>
             <a:pPr>
               <a:spcAft>
-                <a:spcPts val="500"/>
+                <a:spcPts val="459"/>
               </a:spcAft>
             </a:pPr>
             <a:r>
@@ -8202,7 +8911,7 @@
           <a:p>
             <a:pPr>
               <a:spcAft>
-                <a:spcPts val="500"/>
+                <a:spcPts val="459"/>
               </a:spcAft>
             </a:pPr>
             <a:r>
@@ -8227,7 +8936,7 @@
           <a:p>
             <a:pPr>
               <a:spcAft>
-                <a:spcPts val="500"/>
+                <a:spcPts val="459"/>
               </a:spcAft>
             </a:pPr>
             <a:r>
@@ -8252,7 +8961,7 @@
           <a:p>
             <a:pPr>
               <a:spcAft>
-                <a:spcPts val="500"/>
+                <a:spcPts val="459"/>
               </a:spcAft>
             </a:pPr>
             <a:r>
@@ -8277,7 +8986,7 @@
           <a:p>
             <a:pPr>
               <a:spcAft>
-                <a:spcPts val="500"/>
+                <a:spcPts val="459"/>
               </a:spcAft>
             </a:pPr>
             <a:r>
@@ -8302,7 +9011,7 @@
           <a:p>
             <a:pPr>
               <a:spcAft>
-                <a:spcPts val="500"/>
+                <a:spcPts val="459"/>
               </a:spcAft>
             </a:pPr>
             <a:r>
@@ -8321,13 +9030,13 @@
                 </a:solidFill>
                 <a:latin typeface="Arial"/>
               </a:rPr>
-              <a:t>No absolute latency on this host is reproducible between sessions. Every speed statement here is a band or a ratio.</a:t>
+              <a:t>No absolute latency on this host is reproducible between sessions. Every speed statement here is a band or a ratio -- the browser demo's 31.7 ms median included, which is one machine, one WASM thread, one frame at a time, and is not a line rate.</a:t>
             </a:r>
           </a:p>
           <a:p>
             <a:pPr>
               <a:spcAft>
-                <a:spcPts val="500"/>
+                <a:spcPts val="459"/>
               </a:spcAft>
             </a:pPr>
             <a:r>
@@ -8352,7 +9061,7 @@
           <a:p>
             <a:pPr>
               <a:spcAft>
-                <a:spcPts val="500"/>
+                <a:spcPts val="459"/>
               </a:spcAft>
             </a:pPr>
             <a:r>
@@ -8377,7 +9086,7 @@
           <a:p>
             <a:pPr>
               <a:spcAft>
-                <a:spcPts val="500"/>
+                <a:spcPts val="459"/>
               </a:spcAft>
             </a:pPr>
             <a:r>
@@ -8402,7 +9111,7 @@
           <a:p>
             <a:pPr>
               <a:spcAft>
-                <a:spcPts val="500"/>
+                <a:spcPts val="459"/>
               </a:spcAft>
             </a:pPr>
             <a:r>
@@ -8427,7 +9136,7 @@
           <a:p>
             <a:pPr>
               <a:spcAft>
-                <a:spcPts val="500"/>
+                <a:spcPts val="459"/>
               </a:spcAft>
             </a:pPr>
             <a:r>
@@ -8453,7 +9162,7 @@
       </p:sp>
       <p:sp>
         <p:nvSpPr>
-          <p:cNvPr id="11" name="TextBox 10"/>
+          <p:cNvPr id="12" name="TextBox 11"/>
           <p:cNvSpPr txBox="1"/>
           <p:nvPr/>
         </p:nvSpPr>
@@ -8480,7 +9189,7 @@
                 </a:solidFill>
                 <a:latin typeface="Arial"/>
               </a:rPr>
-              <a:t>Sources: reports/model_study.json (bootstrap, runs, limitations) - reports/gap1_cross_domain_fix.md - reports/calibration.md - reports/ood_guard.md - reports/gc10_coverage.md - reports/false_alarm.json - reports/operating_point.json - docs/research_notes.md s1c, s2a, s6a-6b.</a:t>
+              <a:t>Sources: reports/model_study.json (bootstrap, runs, limitations) - reports/gap1_cross_domain_fix.md - reports/calibration.md - reports/ood_guard.md - reports/gc10_coverage.md - reports/false_alarm.json - reports/operating_point.json - site/verify/parity_browser.json and site/verify/parity_report.json (browser parity, timings) - deck/build/live_demo_check.json (https://surface-vision.github.io, live, 27 requests, 0 uploads) - docs/research_notes.md s1c, s2a, s6a-6b.</a:t>
             </a:r>
           </a:p>
         </p:txBody>
@@ -8547,7 +9256,7 @@
         <p:spPr>
           <a:xfrm>
             <a:off x="502920" y="292608"/>
-            <a:ext cx="10454335" cy="256032"/>
+            <a:ext cx="6583680" cy="256032"/>
           </a:xfrm>
           <a:prstGeom prst="rect">
             <a:avLst/>
@@ -8580,8 +9289,8 @@
         </p:nvSpPr>
         <p:spPr>
           <a:xfrm>
-            <a:off x="502920" y="996696"/>
-            <a:ext cx="11185855" cy="201168"/>
+            <a:off x="7269480" y="274320"/>
+            <a:ext cx="3657600" cy="237744"/>
           </a:xfrm>
           <a:prstGeom prst="rect">
             <a:avLst/>
@@ -8594,6 +9303,50 @@
           </a:bodyPr>
           <a:lstStyle/>
           <a:p>
+            <a:pPr algn="r"/>
+            <a:r>
+              <a:rPr sz="800" b="1" i="0">
+                <a:solidFill>
+                  <a:srgbClr val="6B7885"/>
+                </a:solidFill>
+                <a:latin typeface="Arial"/>
+              </a:rPr>
+              <a:t>RUNS LIVE IN YOUR BROWSER   </a:t>
+            </a:r>
+            <a:r>
+              <a:rPr sz="1200" b="1" i="0">
+                <a:solidFill>
+                  <a:srgbClr val="B4551F"/>
+                </a:solidFill>
+                <a:latin typeface="Arial"/>
+              </a:rPr>
+              <a:t>surface-vision.github.io</a:t>
+            </a:r>
+          </a:p>
+        </p:txBody>
+      </p:sp>
+      <p:sp>
+        <p:nvSpPr>
+          <p:cNvPr id="5" name="TextBox 4"/>
+          <p:cNvSpPr txBox="1"/>
+          <p:nvPr/>
+        </p:nvSpPr>
+        <p:spPr>
+          <a:xfrm>
+            <a:off x="502920" y="996696"/>
+            <a:ext cx="11185855" cy="201168"/>
+          </a:xfrm>
+          <a:prstGeom prst="rect">
+            <a:avLst/>
+          </a:prstGeom>
+          <a:noFill/>
+        </p:spPr>
+        <p:txBody>
+          <a:bodyPr wrap="square" lIns="0" rIns="0" tIns="0" bIns="0" anchor="t">
+            <a:spAutoFit/>
+          </a:bodyPr>
+          <a:lstStyle/>
+          <a:p>
             <a:r>
               <a:rPr sz="1050" b="0" i="0">
                 <a:solidFill>
@@ -8608,7 +9361,7 @@
       </p:sp>
       <p:sp>
         <p:nvSpPr>
-          <p:cNvPr id="5" name="Rectangle 4"/>
+          <p:cNvPr id="6" name="Rectangle 5"/>
           <p:cNvSpPr/>
           <p:nvPr/>
         </p:nvSpPr>
@@ -8652,7 +9405,7 @@
       </p:sp>
       <p:sp>
         <p:nvSpPr>
-          <p:cNvPr id="6" name="TextBox 5"/>
+          <p:cNvPr id="7" name="TextBox 6"/>
           <p:cNvSpPr txBox="1"/>
           <p:nvPr/>
         </p:nvSpPr>
@@ -8687,7 +9440,7 @@
       </p:sp>
       <p:pic>
         <p:nvPicPr>
-          <p:cNvPr id="7" name="Picture 6" descr="fig6_roadmap.png"/>
+          <p:cNvPr id="8" name="Picture 7" descr="fig6_roadmap.png"/>
           <p:cNvPicPr>
             <a:picLocks noChangeAspect="1"/>
           </p:cNvPicPr>
@@ -8711,7 +9464,7 @@
       </p:pic>
       <p:sp>
         <p:nvSpPr>
-          <p:cNvPr id="8" name="TextBox 7"/>
+          <p:cNvPr id="9" name="TextBox 8"/>
           <p:cNvSpPr txBox="1"/>
           <p:nvPr/>
         </p:nvSpPr>
@@ -8809,6 +9562,49 @@
                 </a:solidFill>
                 <a:latin typeface="Arial"/>
               </a:rPr>
+              <a:t>Deployment.  </a:t>
+            </a:r>
+            <a:r>
+              <a:rPr sz="840" b="0" i="0">
+                <a:solidFill>
+                  <a:srgbClr val="33414F"/>
+                </a:solidFill>
+                <a:latin typeface="Arial"/>
+              </a:rPr>
+              <a:t>The verified ONNX export also runs client-side: </a:t>
+            </a:r>
+            <a:r>
+              <a:rPr sz="840" b="1" i="0">
+                <a:solidFill>
+                  <a:srgbClr val="B4551F"/>
+                </a:solidFill>
+                <a:latin typeface="Arial"/>
+              </a:rPr>
+              <a:t>surface-vision.github.io</a:t>
+            </a:r>
+            <a:r>
+              <a:rPr sz="840" b="0" i="0">
+                <a:solidFill>
+                  <a:srgbClr val="33414F"/>
+                </a:solidFill>
+                <a:latin typeface="Arial"/>
+              </a:rPr>
+              <a:t> loads the 12.1 MB model once and infers in the tab, uploading nothing -- a live check of the published page logged 27 requests, all GETs for static files, none carrying a body. No cloud dependency, no per-inference cost, no cold start.</a:t>
+            </a:r>
+          </a:p>
+          <a:p>
+            <a:pPr>
+              <a:spcAft>
+                <a:spcPts val="450"/>
+              </a:spcAft>
+            </a:pPr>
+            <a:r>
+              <a:rPr sz="840" b="1" i="0">
+                <a:solidFill>
+                  <a:srgbClr val="1F4E6B"/>
+                </a:solidFill>
+                <a:latin typeface="Arial"/>
+              </a:rPr>
               <a:t>Sustainability.  </a:t>
             </a:r>
             <a:r>
@@ -8825,7 +9621,7 @@
       </p:sp>
       <p:sp>
         <p:nvSpPr>
-          <p:cNvPr id="9" name="TextBox 8"/>
+          <p:cNvPr id="10" name="TextBox 9"/>
           <p:cNvSpPr txBox="1"/>
           <p:nvPr/>
         </p:nvSpPr>
@@ -8864,7 +9660,7 @@
       </p:sp>
       <p:sp>
         <p:nvSpPr>
-          <p:cNvPr id="10" name="TextBox 9"/>
+          <p:cNvPr id="11" name="TextBox 10"/>
           <p:cNvSpPr txBox="1"/>
           <p:nvPr/>
         </p:nvSpPr>
@@ -8898,7 +9694,7 @@
       </p:sp>
       <p:sp>
         <p:nvSpPr>
-          <p:cNvPr id="11" name="Rectangle 10"/>
+          <p:cNvPr id="12" name="Rectangle 11"/>
           <p:cNvSpPr/>
           <p:nvPr/>
         </p:nvSpPr>
@@ -8942,7 +9738,7 @@
       </p:sp>
       <p:sp>
         <p:nvSpPr>
-          <p:cNvPr id="12" name="TextBox 11"/>
+          <p:cNvPr id="13" name="TextBox 12"/>
           <p:cNvSpPr txBox="1"/>
           <p:nvPr/>
         </p:nvSpPr>
@@ -8976,7 +9772,7 @@
       </p:sp>
       <p:sp>
         <p:nvSpPr>
-          <p:cNvPr id="13" name="TextBox 12"/>
+          <p:cNvPr id="14" name="TextBox 13"/>
           <p:cNvSpPr txBox="1"/>
           <p:nvPr/>
         </p:nvSpPr>
@@ -9011,7 +9807,7 @@
       </p:sp>
       <p:sp>
         <p:nvSpPr>
-          <p:cNvPr id="14" name="TextBox 13"/>
+          <p:cNvPr id="15" name="TextBox 14"/>
           <p:cNvSpPr txBox="1"/>
           <p:nvPr/>
         </p:nvSpPr>
@@ -9046,7 +9842,7 @@
       </p:sp>
       <p:sp>
         <p:nvSpPr>
-          <p:cNvPr id="15" name="TextBox 14"/>
+          <p:cNvPr id="16" name="TextBox 15"/>
           <p:cNvSpPr txBox="1"/>
           <p:nvPr/>
         </p:nvSpPr>
@@ -9081,7 +9877,7 @@
       </p:sp>
       <p:sp>
         <p:nvSpPr>
-          <p:cNvPr id="16" name="TextBox 15"/>
+          <p:cNvPr id="17" name="TextBox 16"/>
           <p:cNvSpPr txBox="1"/>
           <p:nvPr/>
         </p:nvSpPr>
@@ -9115,7 +9911,7 @@
       </p:sp>
       <p:sp>
         <p:nvSpPr>
-          <p:cNvPr id="17" name="TextBox 16"/>
+          <p:cNvPr id="18" name="TextBox 17"/>
           <p:cNvSpPr txBox="1"/>
           <p:nvPr/>
         </p:nvSpPr>
@@ -9150,7 +9946,7 @@
       </p:sp>
       <p:sp>
         <p:nvSpPr>
-          <p:cNvPr id="18" name="TextBox 17"/>
+          <p:cNvPr id="19" name="TextBox 18"/>
           <p:cNvSpPr txBox="1"/>
           <p:nvPr/>
         </p:nvSpPr>
@@ -9185,7 +9981,7 @@
       </p:sp>
       <p:sp>
         <p:nvSpPr>
-          <p:cNvPr id="19" name="TextBox 18"/>
+          <p:cNvPr id="20" name="TextBox 19"/>
           <p:cNvSpPr txBox="1"/>
           <p:nvPr/>
         </p:nvSpPr>
@@ -9220,7 +10016,7 @@
       </p:sp>
       <p:sp>
         <p:nvSpPr>
-          <p:cNvPr id="20" name="TextBox 19"/>
+          <p:cNvPr id="21" name="TextBox 20"/>
           <p:cNvSpPr txBox="1"/>
           <p:nvPr/>
         </p:nvSpPr>
@@ -9254,7 +10050,7 @@
       </p:sp>
       <p:sp>
         <p:nvSpPr>
-          <p:cNvPr id="21" name="TextBox 20"/>
+          <p:cNvPr id="22" name="TextBox 21"/>
           <p:cNvSpPr txBox="1"/>
           <p:nvPr/>
         </p:nvSpPr>
@@ -9289,7 +10085,7 @@
       </p:sp>
       <p:sp>
         <p:nvSpPr>
-          <p:cNvPr id="22" name="TextBox 21"/>
+          <p:cNvPr id="23" name="TextBox 22"/>
           <p:cNvSpPr txBox="1"/>
           <p:nvPr/>
         </p:nvSpPr>
@@ -9324,7 +10120,7 @@
       </p:sp>
       <p:sp>
         <p:nvSpPr>
-          <p:cNvPr id="23" name="TextBox 22"/>
+          <p:cNvPr id="24" name="TextBox 23"/>
           <p:cNvSpPr txBox="1"/>
           <p:nvPr/>
         </p:nvSpPr>
@@ -9359,7 +10155,7 @@
       </p:sp>
       <p:sp>
         <p:nvSpPr>
-          <p:cNvPr id="24" name="TextBox 23"/>
+          <p:cNvPr id="25" name="TextBox 24"/>
           <p:cNvSpPr txBox="1"/>
           <p:nvPr/>
         </p:nvSpPr>
@@ -9393,7 +10189,7 @@
       </p:sp>
       <p:sp>
         <p:nvSpPr>
-          <p:cNvPr id="25" name="TextBox 24"/>
+          <p:cNvPr id="26" name="TextBox 25"/>
           <p:cNvSpPr txBox="1"/>
           <p:nvPr/>
         </p:nvSpPr>
@@ -9428,7 +10224,7 @@
       </p:sp>
       <p:sp>
         <p:nvSpPr>
-          <p:cNvPr id="26" name="TextBox 25"/>
+          <p:cNvPr id="27" name="TextBox 26"/>
           <p:cNvSpPr txBox="1"/>
           <p:nvPr/>
         </p:nvSpPr>
@@ -9463,7 +10259,7 @@
       </p:sp>
       <p:sp>
         <p:nvSpPr>
-          <p:cNvPr id="27" name="TextBox 26"/>
+          <p:cNvPr id="28" name="TextBox 27"/>
           <p:cNvSpPr txBox="1"/>
           <p:nvPr/>
         </p:nvSpPr>
@@ -9498,7 +10294,7 @@
       </p:sp>
       <p:sp>
         <p:nvSpPr>
-          <p:cNvPr id="28" name="Rounded Rectangle 27"/>
+          <p:cNvPr id="29" name="Rounded Rectangle 28"/>
           <p:cNvSpPr/>
           <p:nvPr/>
         </p:nvSpPr>
@@ -9546,7 +10342,7 @@
       </p:sp>
       <p:sp>
         <p:nvSpPr>
-          <p:cNvPr id="29" name="TextBox 28"/>
+          <p:cNvPr id="30" name="TextBox 29"/>
           <p:cNvSpPr txBox="1"/>
           <p:nvPr/>
         </p:nvSpPr>
@@ -9614,7 +10410,7 @@
       </p:sp>
       <p:sp>
         <p:nvSpPr>
-          <p:cNvPr id="30" name="TextBox 29"/>
+          <p:cNvPr id="31" name="TextBox 30"/>
           <p:cNvSpPr txBox="1"/>
           <p:nvPr/>
         </p:nvSpPr>
@@ -9803,7 +10599,7 @@
       </p:sp>
       <p:sp>
         <p:nvSpPr>
-          <p:cNvPr id="31" name="TextBox 30"/>
+          <p:cNvPr id="32" name="TextBox 31"/>
           <p:cNvSpPr txBox="1"/>
           <p:nvPr/>
         </p:nvSpPr>
@@ -9830,7 +10626,7 @@
                 </a:solidFill>
                 <a:latin typeface="Arial"/>
               </a:rPr>
-              <a:t>Sources: reports/export_summary.json - reports/export_summary_320.json - reports/benchmark.json - reports/gap1_cross_domain_fix.md (cross-domain AUC, backbone transfer) - models/yolov8n_neudet/results.csv - docs/research_notes.md s3a (Jindal FY26 reported [HARD]), s4c (ROI sweep, [DERIVED], inputs on slide), s6b (self-supervised result [HARD]). The USD 2.4M system cost is [SUSPECT] -- order of magnitude only, no attributable source.</a:t>
+              <a:t>Sources: reports/export_summary.json - reports/export_summary_320.json - reports/benchmark.json - reports/gap1_cross_domain_fix.md (cross-domain AUC, backbone transfer) - models/yolov8n_neudet/results.csv - docs/research_notes.md s3a (Jindal FY26 [HARD]), s4c (ROI sweep, [DERIVED], inputs on slide), s6b (self-supervised [HARD]) - deck/build/live_demo_check.json. The USD 2.4M system cost is [SUSPECT], order of magnitude only. Try it: https://surface-vision.github.io</a:t>
             </a:r>
           </a:p>
         </p:txBody>

--- a/evidence/deck/JSW_Surface_Defect_Detection.pptx
+++ b/evidence/deck/JSW_Surface_Defect_Detection.pptx
@@ -537,12 +537,22 @@
           <a:p/>
           <a:p>
             <a:r>
-              <a:t>Two honest details if asked. It runs on the WASM backend, single-threaded, 31.7 ms median a frame</a:t>
-            </a:r>
-          </a:p>
-          <a:p>
-            <a:r>
-              <a:t>in Chrome on the machine we measured (site/verify/parity_browser.json); your machine will differ, and</a:t>
+              <a:t>Two honest details if asked. It runs on the WASM backend, single-threaded, 30-50 ms a frame in</a:t>
+            </a:r>
+          </a:p>
+          <a:p>
+            <a:r>
+              <a:t>Chrome on the machine we measured (site/verify/parity_browser.json median 31.7 ms, deck/build/</a:t>
+            </a:r>
+          </a:p>
+          <a:p>
+            <a:r>
+              <a:t>live_demo_check.json median 49.1 ms -- the same harness, 1.6x apart between runs); your machine</a:t>
+            </a:r>
+          </a:p>
+          <a:p>
+            <a:r>
+              <a:t>will differ, and</a:t>
             </a:r>
           </a:p>
           <a:p>
@@ -1404,7 +1414,12 @@
           </a:p>
           <a:p>
             <a:r>
-              <a:t>browser figure obeys the same rule -- 31.7 ms is one machine, one thread, one frame.</a:t>
+              <a:t>browser figure obeys the same rule -- 30-50 ms is one machine, one thread, one frame, and the same</a:t>
+            </a:r>
+          </a:p>
+          <a:p>
+            <a:r>
+              <a:t>harness on the same 12 frames returned medians of 31.7 ms and 49.1 ms in two recorded runs.</a:t>
             </a:r>
           </a:p>
         </p:txBody>
@@ -1793,7 +1808,7 @@
           </a:p>
           <a:p>
             <a:r>
-              <a:t>one frame at a time at about 32 ms; slide 2's arithmetic says a real line at full optical</a:t>
+              <a:t>one frame at a time at 30-50 ms; slide 2's arithmetic says a real line at full optical</a:t>
             </a:r>
           </a:p>
           <a:p>
@@ -8793,7 +8808,7 @@
                 </a:solidFill>
                 <a:latin typeface="Arial"/>
               </a:rPr>
-              <a:t> -- real Chrome, WASM, one thread, 31.7 ms median per frame, 40 of 40 detections identical to PyTorch within 0.14 px. No strip image leaves the plant, no cloud, no per-inference cost, no cold start. A proof of deployability, not a proposal to inspect coil in a browser tab.</a:t>
+              <a:t> -- real Chrome, WASM, one thread, 30-50 ms per frame, 40 of 40 detections identical to PyTorch within 0.14 px. No strip image leaves the plant, no cloud, no per-inference cost, no cold start. A proof of deployability, not a proposal to inspect coil in a browser tab.</a:t>
             </a:r>
           </a:p>
         </p:txBody>
@@ -9030,7 +9045,7 @@
                 </a:solidFill>
                 <a:latin typeface="Arial"/>
               </a:rPr>
-              <a:t>No absolute latency on this host is reproducible between sessions. Every speed statement here is a band or a ratio -- the browser demo's 31.7 ms median included, which is one machine, one WASM thread, one frame at a time, and is not a line rate.</a:t>
+              <a:t>No absolute latency on this host is reproducible between sessions. Every speed statement here is a band or a ratio, never a line rate -- the browser demo included: two recorded runs of the same 12 frames median 31.7 ms and 49.1 ms.</a:t>
             </a:r>
           </a:p>
           <a:p>
